--- a/cursos/recursos/los-cimientos-del-ajedrez/12-el-ataque-doble.pptx
+++ b/cursos/recursos/los-cimientos-del-ajedrez/12-el-ataque-doble.pptx
@@ -3711,7 +3711,7 @@
                 </a:solidFill>
                 <a:latin typeface="Calibri"/>
               </a:rPr>
-              <a:t>El ataque doble es la idea táctica más sencilla y la que más partidas decide: una pieza ataca dos objetivos al mismo tiempo. Puede ser dos piezas sin defensa, una pieza y una amenaza de mate, o el rey y otra pieza. La horquilla de caballo es la más conocida, porque el caballo ataca sin ser atacado por la pieza que amenaza. Pero también hacen ataques dobles la dama, el peón, que tiene horquillas muy baratas, y hasta el rey en el final.</a:t>
+              <a:t>El ataque doble es la idea táctica más sencilla y la que más partidas decide: una pieza ataca dos objetivos al mismo tiempo. Puede ser dos piezas sin defensa, una pieza y una amenaza de mate, o el rey y otra pieza. El tenedor de caballo es la más conocida, porque el caballo ataca sin ser atacado por la pieza que amenaza. Pero también hacen ataques dobles la dama, el peón, que tiene tenedores muy baratas, y hasta el rey en el final.</a:t>
             </a:r>
           </a:p>
         </p:txBody>
@@ -3954,7 +3954,7 @@
                 </a:solidFill>
                 <a:latin typeface="Calibri"/>
               </a:rPr>
-              <a:t>Las mejores víctimas de un ataque doble son las piezas sin defensa y el rey. Antes de cada jugada, haz una lista rápida de las piezas rivales que no están protegidas: cada una es un posible objetivo. Después busca una casilla desde la que alguna de tus piezas ataque dos de ellas, o una de ellas y el rey. Las piezas rivales separadas a la distancia de un salto de caballo entre sí son una invitación a la horquilla.</a:t>
+              <a:t>Las mejores víctimas de un ataque doble son las piezas sin defensa y el rey. Antes de cada jugada, haz una lista rápida de las piezas rivales que no están protegidas: cada una es un posible objetivo. Después busca una casilla desde la que alguna de tus piezas ataque dos de ellas, o una de ellas y el rey. Las piezas rivales separadas a la distancia de un salto de caballo entre sí son una invitación al tenedor.</a:t>
             </a:r>
           </a:p>
         </p:txBody>
